--- a/индивидуальный проект(зима)/чат поддержки (1).pptx
+++ b/индивидуальный проект(зима)/чат поддержки (1).pptx
@@ -117,7 +117,7 @@
   </p:defaultTextStyle>
   <p:extLst>
     <p:ext uri="{EFAFB233-063F-42B5-8137-9DF3F51BA10A}">
-      <p15:sldGuideLst xmlns:p15="http://schemas.microsoft.com/office/powerpoint/2012/main"/>
+      <p15:sldGuideLst xmlns:p15="http://schemas.microsoft.com/office/powerpoint/2012/main" xmlns=""/>
     </p:ext>
   </p:extLst>
 </p:presentation>
@@ -153,7 +153,7 @@
           <p:cNvPr id="2" name="Title 1">
             <a:extLst>
               <a:ext uri="{FF2B5EF4-FFF2-40B4-BE49-F238E27FC236}">
-                <a16:creationId xmlns:a16="http://schemas.microsoft.com/office/drawing/2014/main" id="{6F49D6F5-A9D4-C22B-732C-A31A172FB93C}"/>
+                <a16:creationId xmlns:a16="http://schemas.microsoft.com/office/drawing/2014/main" xmlns="" id="{6F49D6F5-A9D4-C22B-732C-A31A172FB93C}"/>
               </a:ext>
             </a:extLst>
           </p:cNvPr>
@@ -192,7 +192,7 @@
           <p:cNvPr id="3" name="Subtitle 2">
             <a:extLst>
               <a:ext uri="{FF2B5EF4-FFF2-40B4-BE49-F238E27FC236}">
-                <a16:creationId xmlns:a16="http://schemas.microsoft.com/office/drawing/2014/main" id="{E11AFD6E-3459-290F-1147-F0C47ACEEA5B}"/>
+                <a16:creationId xmlns:a16="http://schemas.microsoft.com/office/drawing/2014/main" xmlns="" id="{E11AFD6E-3459-290F-1147-F0C47ACEEA5B}"/>
               </a:ext>
             </a:extLst>
           </p:cNvPr>
@@ -264,7 +264,7 @@
           <p:cNvPr id="4" name="Date Placeholder 3">
             <a:extLst>
               <a:ext uri="{FF2B5EF4-FFF2-40B4-BE49-F238E27FC236}">
-                <a16:creationId xmlns:a16="http://schemas.microsoft.com/office/drawing/2014/main" id="{C54674D3-6FB9-5549-B0F2-FD61E82D1FF1}"/>
+                <a16:creationId xmlns:a16="http://schemas.microsoft.com/office/drawing/2014/main" xmlns="" id="{C54674D3-6FB9-5549-B0F2-FD61E82D1FF1}"/>
               </a:ext>
             </a:extLst>
           </p:cNvPr>
@@ -282,7 +282,7 @@
           <a:p>
             <a:fld id="{807E39B8-A7CB-4B82-AC0C-44B99F546761}" type="datetimeFigureOut">
               <a:rPr lang="en-US" dirty="0"/>
-              <a:t>12/26/2025</a:t>
+              <a:t>2/12/2026</a:t>
             </a:fld>
             <a:endParaRPr lang="en-US" dirty="0"/>
           </a:p>
@@ -293,7 +293,7 @@
           <p:cNvPr id="5" name="Footer Placeholder 4">
             <a:extLst>
               <a:ext uri="{FF2B5EF4-FFF2-40B4-BE49-F238E27FC236}">
-                <a16:creationId xmlns:a16="http://schemas.microsoft.com/office/drawing/2014/main" id="{AB239BBC-C979-2C77-493E-CF5498AEB5DB}"/>
+                <a16:creationId xmlns:a16="http://schemas.microsoft.com/office/drawing/2014/main" xmlns="" id="{AB239BBC-C979-2C77-493E-CF5498AEB5DB}"/>
               </a:ext>
             </a:extLst>
           </p:cNvPr>
@@ -322,7 +322,7 @@
           <p:cNvPr id="6" name="Slide Number Placeholder 5">
             <a:extLst>
               <a:ext uri="{FF2B5EF4-FFF2-40B4-BE49-F238E27FC236}">
-                <a16:creationId xmlns:a16="http://schemas.microsoft.com/office/drawing/2014/main" id="{53813B7E-A51C-D9CD-2189-650A9D63BFF9}"/>
+                <a16:creationId xmlns:a16="http://schemas.microsoft.com/office/drawing/2014/main" xmlns="" id="{53813B7E-A51C-D9CD-2189-650A9D63BFF9}"/>
               </a:ext>
             </a:extLst>
           </p:cNvPr>
@@ -358,7 +358,7 @@
   </p:clrMapOvr>
   <p:extLst>
     <p:ext uri="{DCECCB84-F9BA-43D5-87BE-67443E8EF086}">
-      <p15:sldGuideLst xmlns:p15="http://schemas.microsoft.com/office/powerpoint/2012/main">
+      <p15:sldGuideLst xmlns:p15="http://schemas.microsoft.com/office/powerpoint/2012/main" xmlns="">
         <p15:guide id="1" orient="horz" pos="2160">
           <p15:clr>
             <a:srgbClr val="FBAE40"/>
@@ -397,7 +397,7 @@
           <p:cNvPr id="2" name="Title 1">
             <a:extLst>
               <a:ext uri="{FF2B5EF4-FFF2-40B4-BE49-F238E27FC236}">
-                <a16:creationId xmlns:a16="http://schemas.microsoft.com/office/drawing/2014/main" id="{C7C990AE-F72C-4C2E-E2D0-7A8D7EEF08C1}"/>
+                <a16:creationId xmlns:a16="http://schemas.microsoft.com/office/drawing/2014/main" xmlns="" id="{C7C990AE-F72C-4C2E-E2D0-7A8D7EEF08C1}"/>
               </a:ext>
             </a:extLst>
           </p:cNvPr>
@@ -425,7 +425,7 @@
           <p:cNvPr id="3" name="Vertical Text Placeholder 2">
             <a:extLst>
               <a:ext uri="{FF2B5EF4-FFF2-40B4-BE49-F238E27FC236}">
-                <a16:creationId xmlns:a16="http://schemas.microsoft.com/office/drawing/2014/main" id="{1F41B46D-142E-8C8E-C4F4-B6B1586A6FD0}"/>
+                <a16:creationId xmlns:a16="http://schemas.microsoft.com/office/drawing/2014/main" xmlns="" id="{1F41B46D-142E-8C8E-C4F4-B6B1586A6FD0}"/>
               </a:ext>
             </a:extLst>
           </p:cNvPr>
@@ -482,7 +482,7 @@
           <p:cNvPr id="4" name="Date Placeholder 3">
             <a:extLst>
               <a:ext uri="{FF2B5EF4-FFF2-40B4-BE49-F238E27FC236}">
-                <a16:creationId xmlns:a16="http://schemas.microsoft.com/office/drawing/2014/main" id="{954D92E3-36AD-2615-0166-6B73C34F10FA}"/>
+                <a16:creationId xmlns:a16="http://schemas.microsoft.com/office/drawing/2014/main" xmlns="" id="{954D92E3-36AD-2615-0166-6B73C34F10FA}"/>
               </a:ext>
             </a:extLst>
           </p:cNvPr>
@@ -500,7 +500,7 @@
           <a:p>
             <a:fld id="{01742F6F-0846-489A-A4BC-61B476BE2887}" type="datetimeFigureOut">
               <a:rPr lang="en-US" dirty="0"/>
-              <a:t>12/26/2025</a:t>
+              <a:t>2/12/2026</a:t>
             </a:fld>
             <a:endParaRPr lang="en-US" dirty="0"/>
           </a:p>
@@ -511,7 +511,7 @@
           <p:cNvPr id="5" name="Footer Placeholder 4">
             <a:extLst>
               <a:ext uri="{FF2B5EF4-FFF2-40B4-BE49-F238E27FC236}">
-                <a16:creationId xmlns:a16="http://schemas.microsoft.com/office/drawing/2014/main" id="{F10BFB69-319D-2284-2734-217160D396D7}"/>
+                <a16:creationId xmlns:a16="http://schemas.microsoft.com/office/drawing/2014/main" xmlns="" id="{F10BFB69-319D-2284-2734-217160D396D7}"/>
               </a:ext>
             </a:extLst>
           </p:cNvPr>
@@ -540,7 +540,7 @@
           <p:cNvPr id="6" name="Slide Number Placeholder 5">
             <a:extLst>
               <a:ext uri="{FF2B5EF4-FFF2-40B4-BE49-F238E27FC236}">
-                <a16:creationId xmlns:a16="http://schemas.microsoft.com/office/drawing/2014/main" id="{1A6883B0-C775-5BD2-8EC6-A41D19BCA156}"/>
+                <a16:creationId xmlns:a16="http://schemas.microsoft.com/office/drawing/2014/main" xmlns="" id="{1A6883B0-C775-5BD2-8EC6-A41D19BCA156}"/>
               </a:ext>
             </a:extLst>
           </p:cNvPr>
@@ -599,7 +599,7 @@
           <p:cNvPr id="2" name="Vertical Title 1">
             <a:extLst>
               <a:ext uri="{FF2B5EF4-FFF2-40B4-BE49-F238E27FC236}">
-                <a16:creationId xmlns:a16="http://schemas.microsoft.com/office/drawing/2014/main" id="{19040463-6D41-8D45-088A-540B0D18838A}"/>
+                <a16:creationId xmlns:a16="http://schemas.microsoft.com/office/drawing/2014/main" xmlns="" id="{19040463-6D41-8D45-088A-540B0D18838A}"/>
               </a:ext>
             </a:extLst>
           </p:cNvPr>
@@ -632,7 +632,7 @@
           <p:cNvPr id="3" name="Vertical Text Placeholder 2">
             <a:extLst>
               <a:ext uri="{FF2B5EF4-FFF2-40B4-BE49-F238E27FC236}">
-                <a16:creationId xmlns:a16="http://schemas.microsoft.com/office/drawing/2014/main" id="{8B5F2276-7F04-F3F7-E3CE-F81C8DC637DC}"/>
+                <a16:creationId xmlns:a16="http://schemas.microsoft.com/office/drawing/2014/main" xmlns="" id="{8B5F2276-7F04-F3F7-E3CE-F81C8DC637DC}"/>
               </a:ext>
             </a:extLst>
           </p:cNvPr>
@@ -694,7 +694,7 @@
           <p:cNvPr id="4" name="Date Placeholder 3">
             <a:extLst>
               <a:ext uri="{FF2B5EF4-FFF2-40B4-BE49-F238E27FC236}">
-                <a16:creationId xmlns:a16="http://schemas.microsoft.com/office/drawing/2014/main" id="{C71802BF-9E0C-3251-8FAE-81F07DB05344}"/>
+                <a16:creationId xmlns:a16="http://schemas.microsoft.com/office/drawing/2014/main" xmlns="" id="{C71802BF-9E0C-3251-8FAE-81F07DB05344}"/>
               </a:ext>
             </a:extLst>
           </p:cNvPr>
@@ -712,7 +712,7 @@
           <a:p>
             <a:fld id="{B229DF21-A340-467A-94AB-9502647BB771}" type="datetimeFigureOut">
               <a:rPr lang="en-US" dirty="0"/>
-              <a:t>12/26/2025</a:t>
+              <a:t>2/12/2026</a:t>
             </a:fld>
             <a:endParaRPr lang="en-US" dirty="0"/>
           </a:p>
@@ -723,7 +723,7 @@
           <p:cNvPr id="5" name="Footer Placeholder 4">
             <a:extLst>
               <a:ext uri="{FF2B5EF4-FFF2-40B4-BE49-F238E27FC236}">
-                <a16:creationId xmlns:a16="http://schemas.microsoft.com/office/drawing/2014/main" id="{329F1754-5B8F-A9FA-E8B1-06E04CE283D5}"/>
+                <a16:creationId xmlns:a16="http://schemas.microsoft.com/office/drawing/2014/main" xmlns="" id="{329F1754-5B8F-A9FA-E8B1-06E04CE283D5}"/>
               </a:ext>
             </a:extLst>
           </p:cNvPr>
@@ -752,7 +752,7 @@
           <p:cNvPr id="6" name="Slide Number Placeholder 5">
             <a:extLst>
               <a:ext uri="{FF2B5EF4-FFF2-40B4-BE49-F238E27FC236}">
-                <a16:creationId xmlns:a16="http://schemas.microsoft.com/office/drawing/2014/main" id="{5F01E6A8-5139-ECD4-CC0C-32FFC6741000}"/>
+                <a16:creationId xmlns:a16="http://schemas.microsoft.com/office/drawing/2014/main" xmlns="" id="{5F01E6A8-5139-ECD4-CC0C-32FFC6741000}"/>
               </a:ext>
             </a:extLst>
           </p:cNvPr>
@@ -811,7 +811,7 @@
           <p:cNvPr id="2" name="Title 1">
             <a:extLst>
               <a:ext uri="{FF2B5EF4-FFF2-40B4-BE49-F238E27FC236}">
-                <a16:creationId xmlns:a16="http://schemas.microsoft.com/office/drawing/2014/main" id="{31E155F0-A6D4-C39B-394F-0B16E9C9CE81}"/>
+                <a16:creationId xmlns:a16="http://schemas.microsoft.com/office/drawing/2014/main" xmlns="" id="{31E155F0-A6D4-C39B-394F-0B16E9C9CE81}"/>
               </a:ext>
             </a:extLst>
           </p:cNvPr>
@@ -839,7 +839,7 @@
           <p:cNvPr id="3" name="Content Placeholder 2">
             <a:extLst>
               <a:ext uri="{FF2B5EF4-FFF2-40B4-BE49-F238E27FC236}">
-                <a16:creationId xmlns:a16="http://schemas.microsoft.com/office/drawing/2014/main" id="{EBD1860F-B260-57CE-E12B-2C94860319EC}"/>
+                <a16:creationId xmlns:a16="http://schemas.microsoft.com/office/drawing/2014/main" xmlns="" id="{EBD1860F-B260-57CE-E12B-2C94860319EC}"/>
               </a:ext>
             </a:extLst>
           </p:cNvPr>
@@ -896,7 +896,7 @@
           <p:cNvPr id="4" name="Date Placeholder 3">
             <a:extLst>
               <a:ext uri="{FF2B5EF4-FFF2-40B4-BE49-F238E27FC236}">
-                <a16:creationId xmlns:a16="http://schemas.microsoft.com/office/drawing/2014/main" id="{AF745C9F-D94D-E5D3-B73A-20621FA536D5}"/>
+                <a16:creationId xmlns:a16="http://schemas.microsoft.com/office/drawing/2014/main" xmlns="" id="{AF745C9F-D94D-E5D3-B73A-20621FA536D5}"/>
               </a:ext>
             </a:extLst>
           </p:cNvPr>
@@ -914,7 +914,7 @@
           <a:p>
             <a:fld id="{FE7E3940-CA92-4FEE-A698-62CF7BC5AC36}" type="datetimeFigureOut">
               <a:rPr lang="en-US" dirty="0"/>
-              <a:t>12/26/2025</a:t>
+              <a:t>2/12/2026</a:t>
             </a:fld>
             <a:endParaRPr lang="en-US" dirty="0"/>
           </a:p>
@@ -925,7 +925,7 @@
           <p:cNvPr id="5" name="Footer Placeholder 4">
             <a:extLst>
               <a:ext uri="{FF2B5EF4-FFF2-40B4-BE49-F238E27FC236}">
-                <a16:creationId xmlns:a16="http://schemas.microsoft.com/office/drawing/2014/main" id="{E5FAB243-BB42-966A-4708-15C9B11D6885}"/>
+                <a16:creationId xmlns:a16="http://schemas.microsoft.com/office/drawing/2014/main" xmlns="" id="{E5FAB243-BB42-966A-4708-15C9B11D6885}"/>
               </a:ext>
             </a:extLst>
           </p:cNvPr>
@@ -954,7 +954,7 @@
           <p:cNvPr id="6" name="Slide Number Placeholder 5">
             <a:extLst>
               <a:ext uri="{FF2B5EF4-FFF2-40B4-BE49-F238E27FC236}">
-                <a16:creationId xmlns:a16="http://schemas.microsoft.com/office/drawing/2014/main" id="{D5C3A3BD-2CC5-03D3-4CD6-E31A55BA2D23}"/>
+                <a16:creationId xmlns:a16="http://schemas.microsoft.com/office/drawing/2014/main" xmlns="" id="{D5C3A3BD-2CC5-03D3-4CD6-E31A55BA2D23}"/>
               </a:ext>
             </a:extLst>
           </p:cNvPr>
@@ -1013,7 +1013,7 @@
           <p:cNvPr id="2" name="Title 1">
             <a:extLst>
               <a:ext uri="{FF2B5EF4-FFF2-40B4-BE49-F238E27FC236}">
-                <a16:creationId xmlns:a16="http://schemas.microsoft.com/office/drawing/2014/main" id="{FD2D8633-AC3B-E617-1C54-84932DDD72E5}"/>
+                <a16:creationId xmlns:a16="http://schemas.microsoft.com/office/drawing/2014/main" xmlns="" id="{FD2D8633-AC3B-E617-1C54-84932DDD72E5}"/>
               </a:ext>
             </a:extLst>
           </p:cNvPr>
@@ -1052,7 +1052,7 @@
           <p:cNvPr id="3" name="Text Placeholder 2">
             <a:extLst>
               <a:ext uri="{FF2B5EF4-FFF2-40B4-BE49-F238E27FC236}">
-                <a16:creationId xmlns:a16="http://schemas.microsoft.com/office/drawing/2014/main" id="{CF68C242-ECAB-AEC3-7E9B-F9854AF31CD2}"/>
+                <a16:creationId xmlns:a16="http://schemas.microsoft.com/office/drawing/2014/main" xmlns="" id="{CF68C242-ECAB-AEC3-7E9B-F9854AF31CD2}"/>
               </a:ext>
             </a:extLst>
           </p:cNvPr>
@@ -1177,7 +1177,7 @@
           <p:cNvPr id="4" name="Date Placeholder 3">
             <a:extLst>
               <a:ext uri="{FF2B5EF4-FFF2-40B4-BE49-F238E27FC236}">
-                <a16:creationId xmlns:a16="http://schemas.microsoft.com/office/drawing/2014/main" id="{120D9B82-EEF4-2CD7-61FE-BAFB2B96D641}"/>
+                <a16:creationId xmlns:a16="http://schemas.microsoft.com/office/drawing/2014/main" xmlns="" id="{120D9B82-EEF4-2CD7-61FE-BAFB2B96D641}"/>
               </a:ext>
             </a:extLst>
           </p:cNvPr>
@@ -1195,7 +1195,7 @@
           <a:p>
             <a:fld id="{E33CD641-6C35-45D1-9313-2719E9EA8AD8}" type="datetimeFigureOut">
               <a:rPr lang="en-US" dirty="0"/>
-              <a:t>12/26/2025</a:t>
+              <a:t>2/12/2026</a:t>
             </a:fld>
             <a:endParaRPr lang="en-US" dirty="0"/>
           </a:p>
@@ -1206,7 +1206,7 @@
           <p:cNvPr id="5" name="Footer Placeholder 4">
             <a:extLst>
               <a:ext uri="{FF2B5EF4-FFF2-40B4-BE49-F238E27FC236}">
-                <a16:creationId xmlns:a16="http://schemas.microsoft.com/office/drawing/2014/main" id="{59A222B6-F7A8-70A5-B023-FCAD5D7C4BB1}"/>
+                <a16:creationId xmlns:a16="http://schemas.microsoft.com/office/drawing/2014/main" xmlns="" id="{59A222B6-F7A8-70A5-B023-FCAD5D7C4BB1}"/>
               </a:ext>
             </a:extLst>
           </p:cNvPr>
@@ -1235,7 +1235,7 @@
           <p:cNvPr id="6" name="Slide Number Placeholder 5">
             <a:extLst>
               <a:ext uri="{FF2B5EF4-FFF2-40B4-BE49-F238E27FC236}">
-                <a16:creationId xmlns:a16="http://schemas.microsoft.com/office/drawing/2014/main" id="{4E85D758-2E38-8A8D-75BC-667F6A23B95B}"/>
+                <a16:creationId xmlns:a16="http://schemas.microsoft.com/office/drawing/2014/main" xmlns="" id="{4E85D758-2E38-8A8D-75BC-667F6A23B95B}"/>
               </a:ext>
             </a:extLst>
           </p:cNvPr>
@@ -1294,7 +1294,7 @@
           <p:cNvPr id="2" name="Title 1">
             <a:extLst>
               <a:ext uri="{FF2B5EF4-FFF2-40B4-BE49-F238E27FC236}">
-                <a16:creationId xmlns:a16="http://schemas.microsoft.com/office/drawing/2014/main" id="{B1F60DFF-11BD-F5F4-35D4-1986ABBD3675}"/>
+                <a16:creationId xmlns:a16="http://schemas.microsoft.com/office/drawing/2014/main" xmlns="" id="{B1F60DFF-11BD-F5F4-35D4-1986ABBD3675}"/>
               </a:ext>
             </a:extLst>
           </p:cNvPr>
@@ -1322,7 +1322,7 @@
           <p:cNvPr id="3" name="Content Placeholder 2">
             <a:extLst>
               <a:ext uri="{FF2B5EF4-FFF2-40B4-BE49-F238E27FC236}">
-                <a16:creationId xmlns:a16="http://schemas.microsoft.com/office/drawing/2014/main" id="{8C5D1279-E9A9-702E-144D-61114B788E88}"/>
+                <a16:creationId xmlns:a16="http://schemas.microsoft.com/office/drawing/2014/main" xmlns="" id="{8C5D1279-E9A9-702E-144D-61114B788E88}"/>
               </a:ext>
             </a:extLst>
           </p:cNvPr>
@@ -1384,7 +1384,7 @@
           <p:cNvPr id="4" name="Content Placeholder 3">
             <a:extLst>
               <a:ext uri="{FF2B5EF4-FFF2-40B4-BE49-F238E27FC236}">
-                <a16:creationId xmlns:a16="http://schemas.microsoft.com/office/drawing/2014/main" id="{1584E624-7A76-56EC-FA0D-E2AA8EF9B951}"/>
+                <a16:creationId xmlns:a16="http://schemas.microsoft.com/office/drawing/2014/main" xmlns="" id="{1584E624-7A76-56EC-FA0D-E2AA8EF9B951}"/>
               </a:ext>
             </a:extLst>
           </p:cNvPr>
@@ -1446,7 +1446,7 @@
           <p:cNvPr id="5" name="Date Placeholder 4">
             <a:extLst>
               <a:ext uri="{FF2B5EF4-FFF2-40B4-BE49-F238E27FC236}">
-                <a16:creationId xmlns:a16="http://schemas.microsoft.com/office/drawing/2014/main" id="{C99D7DF5-30AD-AE47-D516-5CEE82770734}"/>
+                <a16:creationId xmlns:a16="http://schemas.microsoft.com/office/drawing/2014/main" xmlns="" id="{C99D7DF5-30AD-AE47-D516-5CEE82770734}"/>
               </a:ext>
             </a:extLst>
           </p:cNvPr>
@@ -1464,7 +1464,7 @@
           <a:p>
             <a:fld id="{35301268-3A74-4110-8F08-063DFB8BB885}" type="datetimeFigureOut">
               <a:rPr lang="en-US" dirty="0"/>
-              <a:t>12/26/2025</a:t>
+              <a:t>2/12/2026</a:t>
             </a:fld>
             <a:endParaRPr lang="en-US" dirty="0"/>
           </a:p>
@@ -1475,7 +1475,7 @@
           <p:cNvPr id="6" name="Footer Placeholder 5">
             <a:extLst>
               <a:ext uri="{FF2B5EF4-FFF2-40B4-BE49-F238E27FC236}">
-                <a16:creationId xmlns:a16="http://schemas.microsoft.com/office/drawing/2014/main" id="{8B05C503-B649-B083-6341-F6E376AF8C72}"/>
+                <a16:creationId xmlns:a16="http://schemas.microsoft.com/office/drawing/2014/main" xmlns="" id="{8B05C503-B649-B083-6341-F6E376AF8C72}"/>
               </a:ext>
             </a:extLst>
           </p:cNvPr>
@@ -1504,7 +1504,7 @@
           <p:cNvPr id="7" name="Slide Number Placeholder 6">
             <a:extLst>
               <a:ext uri="{FF2B5EF4-FFF2-40B4-BE49-F238E27FC236}">
-                <a16:creationId xmlns:a16="http://schemas.microsoft.com/office/drawing/2014/main" id="{1E53EA35-CF5A-DB36-8B14-5C184B6F14D3}"/>
+                <a16:creationId xmlns:a16="http://schemas.microsoft.com/office/drawing/2014/main" xmlns="" id="{1E53EA35-CF5A-DB36-8B14-5C184B6F14D3}"/>
               </a:ext>
             </a:extLst>
           </p:cNvPr>
@@ -1563,7 +1563,7 @@
           <p:cNvPr id="2" name="Title 1">
             <a:extLst>
               <a:ext uri="{FF2B5EF4-FFF2-40B4-BE49-F238E27FC236}">
-                <a16:creationId xmlns:a16="http://schemas.microsoft.com/office/drawing/2014/main" id="{A1ABA3D8-FDD9-329B-BCC6-BBF47F01BEE2}"/>
+                <a16:creationId xmlns:a16="http://schemas.microsoft.com/office/drawing/2014/main" xmlns="" id="{A1ABA3D8-FDD9-329B-BCC6-BBF47F01BEE2}"/>
               </a:ext>
             </a:extLst>
           </p:cNvPr>
@@ -1596,7 +1596,7 @@
           <p:cNvPr id="3" name="Text Placeholder 2">
             <a:extLst>
               <a:ext uri="{FF2B5EF4-FFF2-40B4-BE49-F238E27FC236}">
-                <a16:creationId xmlns:a16="http://schemas.microsoft.com/office/drawing/2014/main" id="{82EEF7DC-0699-CB3C-A7CB-39035D89A4A5}"/>
+                <a16:creationId xmlns:a16="http://schemas.microsoft.com/office/drawing/2014/main" xmlns="" id="{82EEF7DC-0699-CB3C-A7CB-39035D89A4A5}"/>
               </a:ext>
             </a:extLst>
           </p:cNvPr>
@@ -1669,7 +1669,7 @@
           <p:cNvPr id="4" name="Content Placeholder 3">
             <a:extLst>
               <a:ext uri="{FF2B5EF4-FFF2-40B4-BE49-F238E27FC236}">
-                <a16:creationId xmlns:a16="http://schemas.microsoft.com/office/drawing/2014/main" id="{D252EB40-99E1-CCA4-BAFA-F51AA56CF295}"/>
+                <a16:creationId xmlns:a16="http://schemas.microsoft.com/office/drawing/2014/main" xmlns="" id="{D252EB40-99E1-CCA4-BAFA-F51AA56CF295}"/>
               </a:ext>
             </a:extLst>
           </p:cNvPr>
@@ -1731,7 +1731,7 @@
           <p:cNvPr id="5" name="Text Placeholder 4">
             <a:extLst>
               <a:ext uri="{FF2B5EF4-FFF2-40B4-BE49-F238E27FC236}">
-                <a16:creationId xmlns:a16="http://schemas.microsoft.com/office/drawing/2014/main" id="{038979BC-6B50-751D-D569-F360938B05C8}"/>
+                <a16:creationId xmlns:a16="http://schemas.microsoft.com/office/drawing/2014/main" xmlns="" id="{038979BC-6B50-751D-D569-F360938B05C8}"/>
               </a:ext>
             </a:extLst>
           </p:cNvPr>
@@ -1804,7 +1804,7 @@
           <p:cNvPr id="6" name="Content Placeholder 5">
             <a:extLst>
               <a:ext uri="{FF2B5EF4-FFF2-40B4-BE49-F238E27FC236}">
-                <a16:creationId xmlns:a16="http://schemas.microsoft.com/office/drawing/2014/main" id="{84A3A26F-230E-2D25-6BDC-6ECA00FAEFD5}"/>
+                <a16:creationId xmlns:a16="http://schemas.microsoft.com/office/drawing/2014/main" xmlns="" id="{84A3A26F-230E-2D25-6BDC-6ECA00FAEFD5}"/>
               </a:ext>
             </a:extLst>
           </p:cNvPr>
@@ -1866,7 +1866,7 @@
           <p:cNvPr id="7" name="Date Placeholder 6">
             <a:extLst>
               <a:ext uri="{FF2B5EF4-FFF2-40B4-BE49-F238E27FC236}">
-                <a16:creationId xmlns:a16="http://schemas.microsoft.com/office/drawing/2014/main" id="{48182A01-DE7C-3BA4-96FF-CDEF2F608FCA}"/>
+                <a16:creationId xmlns:a16="http://schemas.microsoft.com/office/drawing/2014/main" xmlns="" id="{48182A01-DE7C-3BA4-96FF-CDEF2F608FCA}"/>
               </a:ext>
             </a:extLst>
           </p:cNvPr>
@@ -1884,7 +1884,7 @@
           <a:p>
             <a:fld id="{BF91C1AF-C1FB-48A7-98B4-E595E63F6614}" type="datetimeFigureOut">
               <a:rPr lang="en-US" dirty="0"/>
-              <a:t>12/26/2025</a:t>
+              <a:t>2/12/2026</a:t>
             </a:fld>
             <a:endParaRPr lang="en-US" dirty="0"/>
           </a:p>
@@ -1895,7 +1895,7 @@
           <p:cNvPr id="8" name="Footer Placeholder 7">
             <a:extLst>
               <a:ext uri="{FF2B5EF4-FFF2-40B4-BE49-F238E27FC236}">
-                <a16:creationId xmlns:a16="http://schemas.microsoft.com/office/drawing/2014/main" id="{6FCAA828-0166-8ECD-BCE8-654BEFDD7155}"/>
+                <a16:creationId xmlns:a16="http://schemas.microsoft.com/office/drawing/2014/main" xmlns="" id="{6FCAA828-0166-8ECD-BCE8-654BEFDD7155}"/>
               </a:ext>
             </a:extLst>
           </p:cNvPr>
@@ -1924,7 +1924,7 @@
           <p:cNvPr id="9" name="Slide Number Placeholder 8">
             <a:extLst>
               <a:ext uri="{FF2B5EF4-FFF2-40B4-BE49-F238E27FC236}">
-                <a16:creationId xmlns:a16="http://schemas.microsoft.com/office/drawing/2014/main" id="{7690C0D2-459A-04AA-FD90-7687D2FE8A9D}"/>
+                <a16:creationId xmlns:a16="http://schemas.microsoft.com/office/drawing/2014/main" xmlns="" id="{7690C0D2-459A-04AA-FD90-7687D2FE8A9D}"/>
               </a:ext>
             </a:extLst>
           </p:cNvPr>
@@ -1983,7 +1983,7 @@
           <p:cNvPr id="2" name="Title 1">
             <a:extLst>
               <a:ext uri="{FF2B5EF4-FFF2-40B4-BE49-F238E27FC236}">
-                <a16:creationId xmlns:a16="http://schemas.microsoft.com/office/drawing/2014/main" id="{B00D549F-FA71-857F-E02E-3CB63CE683E2}"/>
+                <a16:creationId xmlns:a16="http://schemas.microsoft.com/office/drawing/2014/main" xmlns="" id="{B00D549F-FA71-857F-E02E-3CB63CE683E2}"/>
               </a:ext>
             </a:extLst>
           </p:cNvPr>
@@ -2011,7 +2011,7 @@
           <p:cNvPr id="3" name="Date Placeholder 2">
             <a:extLst>
               <a:ext uri="{FF2B5EF4-FFF2-40B4-BE49-F238E27FC236}">
-                <a16:creationId xmlns:a16="http://schemas.microsoft.com/office/drawing/2014/main" id="{6F569611-F911-D3D4-B613-ACCDA56C45D2}"/>
+                <a16:creationId xmlns:a16="http://schemas.microsoft.com/office/drawing/2014/main" xmlns="" id="{6F569611-F911-D3D4-B613-ACCDA56C45D2}"/>
               </a:ext>
             </a:extLst>
           </p:cNvPr>
@@ -2029,7 +2029,7 @@
           <a:p>
             <a:fld id="{97144C44-5F8C-4BEA-BBCE-8694F126DC43}" type="datetimeFigureOut">
               <a:rPr lang="en-US" dirty="0"/>
-              <a:t>12/26/2025</a:t>
+              <a:t>2/12/2026</a:t>
             </a:fld>
             <a:endParaRPr lang="en-US" dirty="0"/>
           </a:p>
@@ -2040,7 +2040,7 @@
           <p:cNvPr id="4" name="Footer Placeholder 3">
             <a:extLst>
               <a:ext uri="{FF2B5EF4-FFF2-40B4-BE49-F238E27FC236}">
-                <a16:creationId xmlns:a16="http://schemas.microsoft.com/office/drawing/2014/main" id="{F6EA1961-0B6B-8FEB-F2CB-C42E90EF2DFD}"/>
+                <a16:creationId xmlns:a16="http://schemas.microsoft.com/office/drawing/2014/main" xmlns="" id="{F6EA1961-0B6B-8FEB-F2CB-C42E90EF2DFD}"/>
               </a:ext>
             </a:extLst>
           </p:cNvPr>
@@ -2069,7 +2069,7 @@
           <p:cNvPr id="5" name="Slide Number Placeholder 4">
             <a:extLst>
               <a:ext uri="{FF2B5EF4-FFF2-40B4-BE49-F238E27FC236}">
-                <a16:creationId xmlns:a16="http://schemas.microsoft.com/office/drawing/2014/main" id="{F42AA80E-3139-9F1B-9C3E-2A76628CF4F8}"/>
+                <a16:creationId xmlns:a16="http://schemas.microsoft.com/office/drawing/2014/main" xmlns="" id="{F42AA80E-3139-9F1B-9C3E-2A76628CF4F8}"/>
               </a:ext>
             </a:extLst>
           </p:cNvPr>
@@ -2128,7 +2128,7 @@
           <p:cNvPr id="2" name="Date Placeholder 1">
             <a:extLst>
               <a:ext uri="{FF2B5EF4-FFF2-40B4-BE49-F238E27FC236}">
-                <a16:creationId xmlns:a16="http://schemas.microsoft.com/office/drawing/2014/main" id="{1AF54789-9F96-511A-0FB6-24F6A8418C72}"/>
+                <a16:creationId xmlns:a16="http://schemas.microsoft.com/office/drawing/2014/main" xmlns="" id="{1AF54789-9F96-511A-0FB6-24F6A8418C72}"/>
               </a:ext>
             </a:extLst>
           </p:cNvPr>
@@ -2146,7 +2146,7 @@
           <a:p>
             <a:fld id="{039E56F9-C8F2-4EF7-8042-704C94FF2795}" type="datetimeFigureOut">
               <a:rPr lang="en-US" dirty="0"/>
-              <a:t>12/26/2025</a:t>
+              <a:t>2/12/2026</a:t>
             </a:fld>
             <a:endParaRPr lang="en-US" dirty="0"/>
           </a:p>
@@ -2157,7 +2157,7 @@
           <p:cNvPr id="3" name="Footer Placeholder 2">
             <a:extLst>
               <a:ext uri="{FF2B5EF4-FFF2-40B4-BE49-F238E27FC236}">
-                <a16:creationId xmlns:a16="http://schemas.microsoft.com/office/drawing/2014/main" id="{8B780399-ADEF-8F74-9F59-6AD804C9393E}"/>
+                <a16:creationId xmlns:a16="http://schemas.microsoft.com/office/drawing/2014/main" xmlns="" id="{8B780399-ADEF-8F74-9F59-6AD804C9393E}"/>
               </a:ext>
             </a:extLst>
           </p:cNvPr>
@@ -2186,7 +2186,7 @@
           <p:cNvPr id="4" name="Slide Number Placeholder 3">
             <a:extLst>
               <a:ext uri="{FF2B5EF4-FFF2-40B4-BE49-F238E27FC236}">
-                <a16:creationId xmlns:a16="http://schemas.microsoft.com/office/drawing/2014/main" id="{95B6A34F-ABAB-9C4E-38A1-C6EEB944B97C}"/>
+                <a16:creationId xmlns:a16="http://schemas.microsoft.com/office/drawing/2014/main" xmlns="" id="{95B6A34F-ABAB-9C4E-38A1-C6EEB944B97C}"/>
               </a:ext>
             </a:extLst>
           </p:cNvPr>
@@ -2245,7 +2245,7 @@
           <p:cNvPr id="2" name="Title 1">
             <a:extLst>
               <a:ext uri="{FF2B5EF4-FFF2-40B4-BE49-F238E27FC236}">
-                <a16:creationId xmlns:a16="http://schemas.microsoft.com/office/drawing/2014/main" id="{2EFE3917-2BF6-1CE2-F34B-49F0D09A1B91}"/>
+                <a16:creationId xmlns:a16="http://schemas.microsoft.com/office/drawing/2014/main" xmlns="" id="{2EFE3917-2BF6-1CE2-F34B-49F0D09A1B91}"/>
               </a:ext>
             </a:extLst>
           </p:cNvPr>
@@ -2284,7 +2284,7 @@
           <p:cNvPr id="3" name="Content Placeholder 2">
             <a:extLst>
               <a:ext uri="{FF2B5EF4-FFF2-40B4-BE49-F238E27FC236}">
-                <a16:creationId xmlns:a16="http://schemas.microsoft.com/office/drawing/2014/main" id="{40815B8F-A9F3-8583-FFF1-175021F17AF0}"/>
+                <a16:creationId xmlns:a16="http://schemas.microsoft.com/office/drawing/2014/main" xmlns="" id="{40815B8F-A9F3-8583-FFF1-175021F17AF0}"/>
               </a:ext>
             </a:extLst>
           </p:cNvPr>
@@ -2376,7 +2376,7 @@
           <p:cNvPr id="4" name="Text Placeholder 3">
             <a:extLst>
               <a:ext uri="{FF2B5EF4-FFF2-40B4-BE49-F238E27FC236}">
-                <a16:creationId xmlns:a16="http://schemas.microsoft.com/office/drawing/2014/main" id="{C5D90AFF-A949-CE9E-6B94-C1B619612915}"/>
+                <a16:creationId xmlns:a16="http://schemas.microsoft.com/office/drawing/2014/main" xmlns="" id="{C5D90AFF-A949-CE9E-6B94-C1B619612915}"/>
               </a:ext>
             </a:extLst>
           </p:cNvPr>
@@ -2447,7 +2447,7 @@
           <p:cNvPr id="5" name="Date Placeholder 4">
             <a:extLst>
               <a:ext uri="{FF2B5EF4-FFF2-40B4-BE49-F238E27FC236}">
-                <a16:creationId xmlns:a16="http://schemas.microsoft.com/office/drawing/2014/main" id="{DA95267E-088F-FB9A-9469-551890F29F01}"/>
+                <a16:creationId xmlns:a16="http://schemas.microsoft.com/office/drawing/2014/main" xmlns="" id="{DA95267E-088F-FB9A-9469-551890F29F01}"/>
               </a:ext>
             </a:extLst>
           </p:cNvPr>
@@ -2465,7 +2465,7 @@
           <a:p>
             <a:fld id="{4F6932DF-953D-44BD-83F8-5D8DA76EA12A}" type="datetimeFigureOut">
               <a:rPr lang="en-US" dirty="0"/>
-              <a:t>12/26/2025</a:t>
+              <a:t>2/12/2026</a:t>
             </a:fld>
             <a:endParaRPr lang="en-US" dirty="0"/>
           </a:p>
@@ -2476,7 +2476,7 @@
           <p:cNvPr id="6" name="Footer Placeholder 5">
             <a:extLst>
               <a:ext uri="{FF2B5EF4-FFF2-40B4-BE49-F238E27FC236}">
-                <a16:creationId xmlns:a16="http://schemas.microsoft.com/office/drawing/2014/main" id="{38EA3FFC-B3A6-C0B6-5DAE-70BE0D6FBD69}"/>
+                <a16:creationId xmlns:a16="http://schemas.microsoft.com/office/drawing/2014/main" xmlns="" id="{38EA3FFC-B3A6-C0B6-5DAE-70BE0D6FBD69}"/>
               </a:ext>
             </a:extLst>
           </p:cNvPr>
@@ -2505,7 +2505,7 @@
           <p:cNvPr id="7" name="Slide Number Placeholder 6">
             <a:extLst>
               <a:ext uri="{FF2B5EF4-FFF2-40B4-BE49-F238E27FC236}">
-                <a16:creationId xmlns:a16="http://schemas.microsoft.com/office/drawing/2014/main" id="{B108D35F-BC2E-8D14-060F-449CBAF7C0D2}"/>
+                <a16:creationId xmlns:a16="http://schemas.microsoft.com/office/drawing/2014/main" xmlns="" id="{B108D35F-BC2E-8D14-060F-449CBAF7C0D2}"/>
               </a:ext>
             </a:extLst>
           </p:cNvPr>
@@ -2564,7 +2564,7 @@
           <p:cNvPr id="2" name="Title 1">
             <a:extLst>
               <a:ext uri="{FF2B5EF4-FFF2-40B4-BE49-F238E27FC236}">
-                <a16:creationId xmlns:a16="http://schemas.microsoft.com/office/drawing/2014/main" id="{638909ED-ED97-A3CE-5569-77B45F41450A}"/>
+                <a16:creationId xmlns:a16="http://schemas.microsoft.com/office/drawing/2014/main" xmlns="" id="{638909ED-ED97-A3CE-5569-77B45F41450A}"/>
               </a:ext>
             </a:extLst>
           </p:cNvPr>
@@ -2603,7 +2603,7 @@
           <p:cNvPr id="3" name="Picture Placeholder 2">
             <a:extLst>
               <a:ext uri="{FF2B5EF4-FFF2-40B4-BE49-F238E27FC236}">
-                <a16:creationId xmlns:a16="http://schemas.microsoft.com/office/drawing/2014/main" id="{0683BB3A-9E24-DE4C-9619-1502F1B6F389}"/>
+                <a16:creationId xmlns:a16="http://schemas.microsoft.com/office/drawing/2014/main" xmlns="" id="{0683BB3A-9E24-DE4C-9619-1502F1B6F389}"/>
               </a:ext>
             </a:extLst>
           </p:cNvPr>
@@ -2670,7 +2670,7 @@
           <p:cNvPr id="4" name="Text Placeholder 3">
             <a:extLst>
               <a:ext uri="{FF2B5EF4-FFF2-40B4-BE49-F238E27FC236}">
-                <a16:creationId xmlns:a16="http://schemas.microsoft.com/office/drawing/2014/main" id="{94B4CE1F-29E0-88BB-8489-E58236B8B17B}"/>
+                <a16:creationId xmlns:a16="http://schemas.microsoft.com/office/drawing/2014/main" xmlns="" id="{94B4CE1F-29E0-88BB-8489-E58236B8B17B}"/>
               </a:ext>
             </a:extLst>
           </p:cNvPr>
@@ -2741,7 +2741,7 @@
           <p:cNvPr id="5" name="Date Placeholder 4">
             <a:extLst>
               <a:ext uri="{FF2B5EF4-FFF2-40B4-BE49-F238E27FC236}">
-                <a16:creationId xmlns:a16="http://schemas.microsoft.com/office/drawing/2014/main" id="{724B7212-6816-FFD1-50B2-58844AD38E26}"/>
+                <a16:creationId xmlns:a16="http://schemas.microsoft.com/office/drawing/2014/main" xmlns="" id="{724B7212-6816-FFD1-50B2-58844AD38E26}"/>
               </a:ext>
             </a:extLst>
           </p:cNvPr>
@@ -2759,7 +2759,7 @@
           <a:p>
             <a:fld id="{352F326D-65F4-4B2F-9A62-9E4BD9402C47}" type="datetimeFigureOut">
               <a:rPr lang="en-US" dirty="0"/>
-              <a:t>12/26/2025</a:t>
+              <a:t>2/12/2026</a:t>
             </a:fld>
             <a:endParaRPr lang="en-US" dirty="0"/>
           </a:p>
@@ -2770,7 +2770,7 @@
           <p:cNvPr id="6" name="Footer Placeholder 5">
             <a:extLst>
               <a:ext uri="{FF2B5EF4-FFF2-40B4-BE49-F238E27FC236}">
-                <a16:creationId xmlns:a16="http://schemas.microsoft.com/office/drawing/2014/main" id="{A2417744-5A24-B7B7-5FD6-E98E60832F27}"/>
+                <a16:creationId xmlns:a16="http://schemas.microsoft.com/office/drawing/2014/main" xmlns="" id="{A2417744-5A24-B7B7-5FD6-E98E60832F27}"/>
               </a:ext>
             </a:extLst>
           </p:cNvPr>
@@ -2799,7 +2799,7 @@
           <p:cNvPr id="7" name="Slide Number Placeholder 6">
             <a:extLst>
               <a:ext uri="{FF2B5EF4-FFF2-40B4-BE49-F238E27FC236}">
-                <a16:creationId xmlns:a16="http://schemas.microsoft.com/office/drawing/2014/main" id="{14CDA4D1-A71D-A7A6-3D0C-294E5D280BE8}"/>
+                <a16:creationId xmlns:a16="http://schemas.microsoft.com/office/drawing/2014/main" xmlns="" id="{14CDA4D1-A71D-A7A6-3D0C-294E5D280BE8}"/>
               </a:ext>
             </a:extLst>
           </p:cNvPr>
@@ -2863,7 +2863,7 @@
           <p:cNvPr id="7" name="Rectangle 6">
             <a:extLst>
               <a:ext uri="{FF2B5EF4-FFF2-40B4-BE49-F238E27FC236}">
-                <a16:creationId xmlns:a16="http://schemas.microsoft.com/office/drawing/2014/main" id="{95858A62-FE72-978B-BE71-05908D82E1A4}"/>
+                <a16:creationId xmlns:a16="http://schemas.microsoft.com/office/drawing/2014/main" xmlns="" id="{95858A62-FE72-978B-BE71-05908D82E1A4}"/>
               </a:ext>
             </a:extLst>
           </p:cNvPr>
@@ -2913,7 +2913,7 @@
           <p:cNvPr id="2" name="Title Placeholder 1">
             <a:extLst>
               <a:ext uri="{FF2B5EF4-FFF2-40B4-BE49-F238E27FC236}">
-                <a16:creationId xmlns:a16="http://schemas.microsoft.com/office/drawing/2014/main" id="{5BFA14B7-4740-5D9F-6489-BAD00C3E0D68}"/>
+                <a16:creationId xmlns:a16="http://schemas.microsoft.com/office/drawing/2014/main" xmlns="" id="{5BFA14B7-4740-5D9F-6489-BAD00C3E0D68}"/>
               </a:ext>
             </a:extLst>
           </p:cNvPr>
@@ -2951,7 +2951,7 @@
           <p:cNvPr id="3" name="Text Placeholder 2">
             <a:extLst>
               <a:ext uri="{FF2B5EF4-FFF2-40B4-BE49-F238E27FC236}">
-                <a16:creationId xmlns:a16="http://schemas.microsoft.com/office/drawing/2014/main" id="{7790487F-803F-C5AF-BD93-39C0FC738963}"/>
+                <a16:creationId xmlns:a16="http://schemas.microsoft.com/office/drawing/2014/main" xmlns="" id="{7790487F-803F-C5AF-BD93-39C0FC738963}"/>
               </a:ext>
             </a:extLst>
           </p:cNvPr>
@@ -3018,7 +3018,7 @@
           <p:cNvPr id="4" name="Date Placeholder 3">
             <a:extLst>
               <a:ext uri="{FF2B5EF4-FFF2-40B4-BE49-F238E27FC236}">
-                <a16:creationId xmlns:a16="http://schemas.microsoft.com/office/drawing/2014/main" id="{A586FCEF-4EDF-C2EF-7D81-FEFF7042F350}"/>
+                <a16:creationId xmlns:a16="http://schemas.microsoft.com/office/drawing/2014/main" xmlns="" id="{A586FCEF-4EDF-C2EF-7D81-FEFF7042F350}"/>
               </a:ext>
             </a:extLst>
           </p:cNvPr>
@@ -3052,7 +3052,7 @@
           <a:p>
             <a:fld id="{F9B0CB28-85DB-480B-8C99-FD493ACC7120}" type="datetimeFigureOut">
               <a:rPr lang="en-US" dirty="0"/>
-              <a:t>12/26/2025</a:t>
+              <a:t>2/12/2026</a:t>
             </a:fld>
             <a:endParaRPr lang="en-US" dirty="0"/>
           </a:p>
@@ -3063,7 +3063,7 @@
           <p:cNvPr id="5" name="Footer Placeholder 4">
             <a:extLst>
               <a:ext uri="{FF2B5EF4-FFF2-40B4-BE49-F238E27FC236}">
-                <a16:creationId xmlns:a16="http://schemas.microsoft.com/office/drawing/2014/main" id="{9A4663BC-4D46-C74D-DDF2-9D25B4D96F9B}"/>
+                <a16:creationId xmlns:a16="http://schemas.microsoft.com/office/drawing/2014/main" xmlns="" id="{9A4663BC-4D46-C74D-DDF2-9D25B4D96F9B}"/>
               </a:ext>
             </a:extLst>
           </p:cNvPr>
@@ -3108,7 +3108,7 @@
           <p:cNvPr id="6" name="Slide Number Placeholder 5">
             <a:extLst>
               <a:ext uri="{FF2B5EF4-FFF2-40B4-BE49-F238E27FC236}">
-                <a16:creationId xmlns:a16="http://schemas.microsoft.com/office/drawing/2014/main" id="{B71B4EAE-CB5C-D14B-77EF-7B155FA68353}"/>
+                <a16:creationId xmlns:a16="http://schemas.microsoft.com/office/drawing/2014/main" xmlns="" id="{B71B4EAE-CB5C-D14B-77EF-7B155FA68353}"/>
               </a:ext>
             </a:extLst>
           </p:cNvPr>
@@ -3454,7 +3454,7 @@
   </p:txStyles>
   <p:extLst>
     <p:ext uri="{27BBF7A9-308A-43DC-89C8-2F10F3537804}">
-      <p15:sldGuideLst xmlns:p15="http://schemas.microsoft.com/office/powerpoint/2012/main">
+      <p15:sldGuideLst xmlns:p15="http://schemas.microsoft.com/office/powerpoint/2012/main" xmlns="">
         <p15:guide id="3" orient="horz" pos="2160">
           <p15:clr>
             <a:srgbClr val="F26B43"/>
@@ -3610,7 +3610,7 @@
           <p:cNvPr id="4" name="Рисунок 3" descr="Изображение выглядит как мультфильм, графическая вставка, Анимация, иллюстрация&#10;&#10;Содержимое, созданное искусственным интеллектом, может быть неверным.">
             <a:extLst>
               <a:ext uri="{FF2B5EF4-FFF2-40B4-BE49-F238E27FC236}">
-                <a16:creationId xmlns:a16="http://schemas.microsoft.com/office/drawing/2014/main" id="{6263B0A7-1C35-3F65-B1FD-F7863E105277}"/>
+                <a16:creationId xmlns:a16="http://schemas.microsoft.com/office/drawing/2014/main" xmlns="" id="{6263B0A7-1C35-3F65-B1FD-F7863E105277}"/>
               </a:ext>
             </a:extLst>
           </p:cNvPr>
@@ -3670,7 +3670,7 @@
           <p:cNvPr id="2" name="Заголовок 1">
             <a:extLst>
               <a:ext uri="{FF2B5EF4-FFF2-40B4-BE49-F238E27FC236}">
-                <a16:creationId xmlns:a16="http://schemas.microsoft.com/office/drawing/2014/main" id="{39A81D0C-58CE-235B-7921-A7E8B7C9644C}"/>
+                <a16:creationId xmlns:a16="http://schemas.microsoft.com/office/drawing/2014/main" xmlns="" id="{39A81D0C-58CE-235B-7921-A7E8B7C9644C}"/>
               </a:ext>
             </a:extLst>
           </p:cNvPr>
@@ -3703,7 +3703,7 @@
           <p:cNvPr id="3" name="Объект 2">
             <a:extLst>
               <a:ext uri="{FF2B5EF4-FFF2-40B4-BE49-F238E27FC236}">
-                <a16:creationId xmlns:a16="http://schemas.microsoft.com/office/drawing/2014/main" id="{AE681C37-F0A7-C47A-01C1-1C81563E7037}"/>
+                <a16:creationId xmlns:a16="http://schemas.microsoft.com/office/drawing/2014/main" xmlns="" id="{AE681C37-F0A7-C47A-01C1-1C81563E7037}"/>
               </a:ext>
             </a:extLst>
           </p:cNvPr>
@@ -3846,7 +3846,7 @@
           <p:cNvPr id="4" name="Дата 3">
             <a:extLst>
               <a:ext uri="{FF2B5EF4-FFF2-40B4-BE49-F238E27FC236}">
-                <a16:creationId xmlns:a16="http://schemas.microsoft.com/office/drawing/2014/main" id="{68D20BE9-366F-2118-3EAC-31EA2766C12C}"/>
+                <a16:creationId xmlns:a16="http://schemas.microsoft.com/office/drawing/2014/main" xmlns="" id="{68D20BE9-366F-2118-3EAC-31EA2766C12C}"/>
               </a:ext>
             </a:extLst>
           </p:cNvPr>
@@ -3863,7 +3863,7 @@
           <a:lstStyle/>
           <a:p>
             <a:fld id="{473699CA-0CB4-4D3D-9C58-7260D827C568}" type="datetime1">
-              <a:t>12/26/2025</a:t>
+              <a:t>12.02.2026</a:t>
             </a:fld>
             <a:endParaRPr lang="en-US" dirty="0"/>
           </a:p>
@@ -3874,7 +3874,7 @@
           <p:cNvPr id="5" name="Нижний колонтитул 4">
             <a:extLst>
               <a:ext uri="{FF2B5EF4-FFF2-40B4-BE49-F238E27FC236}">
-                <a16:creationId xmlns:a16="http://schemas.microsoft.com/office/drawing/2014/main" id="{3DF47A7F-04EC-5AA3-A210-1D455BF73273}"/>
+                <a16:creationId xmlns:a16="http://schemas.microsoft.com/office/drawing/2014/main" xmlns="" id="{3DF47A7F-04EC-5AA3-A210-1D455BF73273}"/>
               </a:ext>
             </a:extLst>
           </p:cNvPr>
@@ -3903,7 +3903,7 @@
           <p:cNvPr id="6" name="Номер слайда 5">
             <a:extLst>
               <a:ext uri="{FF2B5EF4-FFF2-40B4-BE49-F238E27FC236}">
-                <a16:creationId xmlns:a16="http://schemas.microsoft.com/office/drawing/2014/main" id="{143E1D4E-0410-A91E-AE35-044BAEB5CD6E}"/>
+                <a16:creationId xmlns:a16="http://schemas.microsoft.com/office/drawing/2014/main" xmlns="" id="{143E1D4E-0410-A91E-AE35-044BAEB5CD6E}"/>
               </a:ext>
             </a:extLst>
           </p:cNvPr>
@@ -3962,7 +3962,7 @@
           <p:cNvPr id="7" name="Рисунок 6" descr="Изображение выглядит как игрушка&#10;&#10;Содержимое, созданное искусственным интеллектом, может быть неверным.">
             <a:extLst>
               <a:ext uri="{FF2B5EF4-FFF2-40B4-BE49-F238E27FC236}">
-                <a16:creationId xmlns:a16="http://schemas.microsoft.com/office/drawing/2014/main" id="{043B36DD-5004-4F53-4421-472A18BCC5E5}"/>
+                <a16:creationId xmlns:a16="http://schemas.microsoft.com/office/drawing/2014/main" xmlns="" id="{043B36DD-5004-4F53-4421-472A18BCC5E5}"/>
               </a:ext>
             </a:extLst>
           </p:cNvPr>
@@ -3992,7 +3992,7 @@
           <p:cNvPr id="2" name="Заголовок 1">
             <a:extLst>
               <a:ext uri="{FF2B5EF4-FFF2-40B4-BE49-F238E27FC236}">
-                <a16:creationId xmlns:a16="http://schemas.microsoft.com/office/drawing/2014/main" id="{AA41E452-33EE-B93C-58B1-E5EF714E6F24}"/>
+                <a16:creationId xmlns:a16="http://schemas.microsoft.com/office/drawing/2014/main" xmlns="" id="{AA41E452-33EE-B93C-58B1-E5EF714E6F24}"/>
               </a:ext>
             </a:extLst>
           </p:cNvPr>
@@ -4025,7 +4025,7 @@
           <p:cNvPr id="3" name="Объект 2">
             <a:extLst>
               <a:ext uri="{FF2B5EF4-FFF2-40B4-BE49-F238E27FC236}">
-                <a16:creationId xmlns:a16="http://schemas.microsoft.com/office/drawing/2014/main" id="{4DF4417E-5F7B-7334-1B9C-3AA4249B58A3}"/>
+                <a16:creationId xmlns:a16="http://schemas.microsoft.com/office/drawing/2014/main" xmlns="" id="{4DF4417E-5F7B-7334-1B9C-3AA4249B58A3}"/>
               </a:ext>
             </a:extLst>
           </p:cNvPr>
@@ -4108,7 +4108,7 @@
           <p:cNvPr id="4" name="Дата 3">
             <a:extLst>
               <a:ext uri="{FF2B5EF4-FFF2-40B4-BE49-F238E27FC236}">
-                <a16:creationId xmlns:a16="http://schemas.microsoft.com/office/drawing/2014/main" id="{5672964A-BA2A-61C2-378C-46F1F56354BC}"/>
+                <a16:creationId xmlns:a16="http://schemas.microsoft.com/office/drawing/2014/main" xmlns="" id="{5672964A-BA2A-61C2-378C-46F1F56354BC}"/>
               </a:ext>
             </a:extLst>
           </p:cNvPr>
@@ -4125,7 +4125,7 @@
           <a:lstStyle/>
           <a:p>
             <a:fld id="{2A04101A-9D92-410A-A5B6-581DEAA7A1B4}" type="datetime1">
-              <a:t>12/26/2025</a:t>
+              <a:t>12.02.2026</a:t>
             </a:fld>
             <a:endParaRPr lang="en-US" dirty="0"/>
           </a:p>
@@ -4136,7 +4136,7 @@
           <p:cNvPr id="5" name="Нижний колонтитул 4">
             <a:extLst>
               <a:ext uri="{FF2B5EF4-FFF2-40B4-BE49-F238E27FC236}">
-                <a16:creationId xmlns:a16="http://schemas.microsoft.com/office/drawing/2014/main" id="{4762C0CF-8352-8167-2310-067F27F4AFFE}"/>
+                <a16:creationId xmlns:a16="http://schemas.microsoft.com/office/drawing/2014/main" xmlns="" id="{4762C0CF-8352-8167-2310-067F27F4AFFE}"/>
               </a:ext>
             </a:extLst>
           </p:cNvPr>
@@ -4165,7 +4165,7 @@
           <p:cNvPr id="6" name="Номер слайда 5">
             <a:extLst>
               <a:ext uri="{FF2B5EF4-FFF2-40B4-BE49-F238E27FC236}">
-                <a16:creationId xmlns:a16="http://schemas.microsoft.com/office/drawing/2014/main" id="{F751F618-A894-D26A-A13C-039170889EE5}"/>
+                <a16:creationId xmlns:a16="http://schemas.microsoft.com/office/drawing/2014/main" xmlns="" id="{F751F618-A894-D26A-A13C-039170889EE5}"/>
               </a:ext>
             </a:extLst>
           </p:cNvPr>
@@ -4224,7 +4224,7 @@
           <p:cNvPr id="2" name="Заголовок 1">
             <a:extLst>
               <a:ext uri="{FF2B5EF4-FFF2-40B4-BE49-F238E27FC236}">
-                <a16:creationId xmlns:a16="http://schemas.microsoft.com/office/drawing/2014/main" id="{15DC118B-B874-775C-B811-5D31BEE7C9B8}"/>
+                <a16:creationId xmlns:a16="http://schemas.microsoft.com/office/drawing/2014/main" xmlns="" id="{15DC118B-B874-775C-B811-5D31BEE7C9B8}"/>
               </a:ext>
             </a:extLst>
           </p:cNvPr>
@@ -4257,7 +4257,7 @@
           <p:cNvPr id="4" name="Дата 3">
             <a:extLst>
               <a:ext uri="{FF2B5EF4-FFF2-40B4-BE49-F238E27FC236}">
-                <a16:creationId xmlns:a16="http://schemas.microsoft.com/office/drawing/2014/main" id="{E1F49793-D2B0-DA70-2A6A-47C28CD48557}"/>
+                <a16:creationId xmlns:a16="http://schemas.microsoft.com/office/drawing/2014/main" xmlns="" id="{E1F49793-D2B0-DA70-2A6A-47C28CD48557}"/>
               </a:ext>
             </a:extLst>
           </p:cNvPr>
@@ -4274,7 +4274,7 @@
           <a:lstStyle/>
           <a:p>
             <a:fld id="{2F67C624-7AA1-42BD-AB0C-A42B30C49B82}" type="datetime1">
-              <a:t>12/26/2025</a:t>
+              <a:t>12.02.2026</a:t>
             </a:fld>
             <a:endParaRPr lang="en-US" dirty="0"/>
           </a:p>
@@ -4285,7 +4285,7 @@
           <p:cNvPr id="5" name="Нижний колонтитул 4">
             <a:extLst>
               <a:ext uri="{FF2B5EF4-FFF2-40B4-BE49-F238E27FC236}">
-                <a16:creationId xmlns:a16="http://schemas.microsoft.com/office/drawing/2014/main" id="{CFA3BCE3-5838-B290-BA47-C15A90EF4586}"/>
+                <a16:creationId xmlns:a16="http://schemas.microsoft.com/office/drawing/2014/main" xmlns="" id="{CFA3BCE3-5838-B290-BA47-C15A90EF4586}"/>
               </a:ext>
             </a:extLst>
           </p:cNvPr>
@@ -4314,7 +4314,7 @@
           <p:cNvPr id="6" name="Номер слайда 5">
             <a:extLst>
               <a:ext uri="{FF2B5EF4-FFF2-40B4-BE49-F238E27FC236}">
-                <a16:creationId xmlns:a16="http://schemas.microsoft.com/office/drawing/2014/main" id="{60F0B457-F4A0-446C-5E42-69BFC0875874}"/>
+                <a16:creationId xmlns:a16="http://schemas.microsoft.com/office/drawing/2014/main" xmlns="" id="{60F0B457-F4A0-446C-5E42-69BFC0875874}"/>
               </a:ext>
             </a:extLst>
           </p:cNvPr>
@@ -4343,7 +4343,7 @@
           <p:cNvPr id="7" name="Рисунок 6" descr="Изображение выглядит как мультфильм, игрушка, искусство&#10;&#10;Содержимое, созданное искусственным интеллектом, может быть неверным.">
             <a:extLst>
               <a:ext uri="{FF2B5EF4-FFF2-40B4-BE49-F238E27FC236}">
-                <a16:creationId xmlns:a16="http://schemas.microsoft.com/office/drawing/2014/main" id="{0F562BB3-DC2F-1620-E644-27E3FF9E5011}"/>
+                <a16:creationId xmlns:a16="http://schemas.microsoft.com/office/drawing/2014/main" xmlns="" id="{0F562BB3-DC2F-1620-E644-27E3FF9E5011}"/>
               </a:ext>
             </a:extLst>
           </p:cNvPr>
@@ -4403,7 +4403,7 @@
           <p:cNvPr id="2" name="Заголовок 1">
             <a:extLst>
               <a:ext uri="{FF2B5EF4-FFF2-40B4-BE49-F238E27FC236}">
-                <a16:creationId xmlns:a16="http://schemas.microsoft.com/office/drawing/2014/main" id="{21718320-9F5A-0E5E-562C-5E9623F3FCF3}"/>
+                <a16:creationId xmlns:a16="http://schemas.microsoft.com/office/drawing/2014/main" xmlns="" id="{21718320-9F5A-0E5E-562C-5E9623F3FCF3}"/>
               </a:ext>
             </a:extLst>
           </p:cNvPr>
@@ -4436,7 +4436,7 @@
           <p:cNvPr id="3" name="Объект 2">
             <a:extLst>
               <a:ext uri="{FF2B5EF4-FFF2-40B4-BE49-F238E27FC236}">
-                <a16:creationId xmlns:a16="http://schemas.microsoft.com/office/drawing/2014/main" id="{44B770F0-B7F7-4FC3-CE94-1775DE9DFD98}"/>
+                <a16:creationId xmlns:a16="http://schemas.microsoft.com/office/drawing/2014/main" xmlns="" id="{44B770F0-B7F7-4FC3-CE94-1775DE9DFD98}"/>
               </a:ext>
             </a:extLst>
           </p:cNvPr>
@@ -4508,7 +4508,7 @@
           <p:cNvPr id="4" name="Дата 3">
             <a:extLst>
               <a:ext uri="{FF2B5EF4-FFF2-40B4-BE49-F238E27FC236}">
-                <a16:creationId xmlns:a16="http://schemas.microsoft.com/office/drawing/2014/main" id="{113ACFF7-401F-4BC7-FC2A-EFCC8A6C1CBF}"/>
+                <a16:creationId xmlns:a16="http://schemas.microsoft.com/office/drawing/2014/main" xmlns="" id="{113ACFF7-401F-4BC7-FC2A-EFCC8A6C1CBF}"/>
               </a:ext>
             </a:extLst>
           </p:cNvPr>
@@ -4525,7 +4525,7 @@
           <a:lstStyle/>
           <a:p>
             <a:fld id="{4A71B026-7D33-4601-9A17-48DEF95AFCA2}" type="datetime1">
-              <a:t>12/26/2025</a:t>
+              <a:t>12.02.2026</a:t>
             </a:fld>
             <a:endParaRPr lang="en-US" dirty="0"/>
           </a:p>
@@ -4536,7 +4536,7 @@
           <p:cNvPr id="5" name="Нижний колонтитул 4">
             <a:extLst>
               <a:ext uri="{FF2B5EF4-FFF2-40B4-BE49-F238E27FC236}">
-                <a16:creationId xmlns:a16="http://schemas.microsoft.com/office/drawing/2014/main" id="{FDE1ACF7-BFC2-E63E-480B-D179BADE092F}"/>
+                <a16:creationId xmlns:a16="http://schemas.microsoft.com/office/drawing/2014/main" xmlns="" id="{FDE1ACF7-BFC2-E63E-480B-D179BADE092F}"/>
               </a:ext>
             </a:extLst>
           </p:cNvPr>
@@ -4565,7 +4565,7 @@
           <p:cNvPr id="6" name="Номер слайда 5">
             <a:extLst>
               <a:ext uri="{FF2B5EF4-FFF2-40B4-BE49-F238E27FC236}">
-                <a16:creationId xmlns:a16="http://schemas.microsoft.com/office/drawing/2014/main" id="{4F3E70F8-04EA-AFF9-39B0-34E4EEDF4A21}"/>
+                <a16:creationId xmlns:a16="http://schemas.microsoft.com/office/drawing/2014/main" xmlns="" id="{4F3E70F8-04EA-AFF9-39B0-34E4EEDF4A21}"/>
               </a:ext>
             </a:extLst>
           </p:cNvPr>
@@ -4624,7 +4624,7 @@
           <p:cNvPr id="2" name="Заголовок 1">
             <a:extLst>
               <a:ext uri="{FF2B5EF4-FFF2-40B4-BE49-F238E27FC236}">
-                <a16:creationId xmlns:a16="http://schemas.microsoft.com/office/drawing/2014/main" id="{83E10C2C-3A96-1DC9-0505-867FCBFD376B}"/>
+                <a16:creationId xmlns:a16="http://schemas.microsoft.com/office/drawing/2014/main" xmlns="" id="{83E10C2C-3A96-1DC9-0505-867FCBFD376B}"/>
               </a:ext>
             </a:extLst>
           </p:cNvPr>
@@ -4657,7 +4657,7 @@
           <p:cNvPr id="3" name="Объект 2">
             <a:extLst>
               <a:ext uri="{FF2B5EF4-FFF2-40B4-BE49-F238E27FC236}">
-                <a16:creationId xmlns:a16="http://schemas.microsoft.com/office/drawing/2014/main" id="{120BB951-1667-A4F8-1BFB-69D6F7F493B8}"/>
+                <a16:creationId xmlns:a16="http://schemas.microsoft.com/office/drawing/2014/main" xmlns="" id="{120BB951-1667-A4F8-1BFB-69D6F7F493B8}"/>
               </a:ext>
             </a:extLst>
           </p:cNvPr>
@@ -4764,7 +4764,7 @@
           <p:cNvPr id="4" name="Дата 3">
             <a:extLst>
               <a:ext uri="{FF2B5EF4-FFF2-40B4-BE49-F238E27FC236}">
-                <a16:creationId xmlns:a16="http://schemas.microsoft.com/office/drawing/2014/main" id="{1ABC38AA-B668-2B48-F2A1-274659FEB874}"/>
+                <a16:creationId xmlns:a16="http://schemas.microsoft.com/office/drawing/2014/main" xmlns="" id="{1ABC38AA-B668-2B48-F2A1-274659FEB874}"/>
               </a:ext>
             </a:extLst>
           </p:cNvPr>
@@ -4781,7 +4781,7 @@
           <a:lstStyle/>
           <a:p>
             <a:fld id="{F5DB906E-32E3-45D1-B1DE-7D641A28A27E}" type="datetime1">
-              <a:t>12/26/2025</a:t>
+              <a:t>12.02.2026</a:t>
             </a:fld>
             <a:endParaRPr lang="en-US" dirty="0"/>
           </a:p>
@@ -4792,7 +4792,7 @@
           <p:cNvPr id="5" name="Нижний колонтитул 4">
             <a:extLst>
               <a:ext uri="{FF2B5EF4-FFF2-40B4-BE49-F238E27FC236}">
-                <a16:creationId xmlns:a16="http://schemas.microsoft.com/office/drawing/2014/main" id="{144142B3-866C-C62E-5575-6C81C1331AFF}"/>
+                <a16:creationId xmlns:a16="http://schemas.microsoft.com/office/drawing/2014/main" xmlns="" id="{144142B3-866C-C62E-5575-6C81C1331AFF}"/>
               </a:ext>
             </a:extLst>
           </p:cNvPr>
@@ -4821,7 +4821,7 @@
           <p:cNvPr id="6" name="Номер слайда 5">
             <a:extLst>
               <a:ext uri="{FF2B5EF4-FFF2-40B4-BE49-F238E27FC236}">
-                <a16:creationId xmlns:a16="http://schemas.microsoft.com/office/drawing/2014/main" id="{5546D765-64BB-A898-35B6-1BB85332CAF9}"/>
+                <a16:creationId xmlns:a16="http://schemas.microsoft.com/office/drawing/2014/main" xmlns="" id="{5546D765-64BB-A898-35B6-1BB85332CAF9}"/>
               </a:ext>
             </a:extLst>
           </p:cNvPr>
@@ -4850,7 +4850,7 @@
           <p:cNvPr id="7" name="Рисунок 6" descr="Изображение выглядит как мультфильм, игрушка, искусство&#10;&#10;Содержимое, созданное искусственным интеллектом, может быть неверным.">
             <a:extLst>
               <a:ext uri="{FF2B5EF4-FFF2-40B4-BE49-F238E27FC236}">
-                <a16:creationId xmlns:a16="http://schemas.microsoft.com/office/drawing/2014/main" id="{F1BB7E8A-669F-A247-FB50-4CF7AB872730}"/>
+                <a16:creationId xmlns:a16="http://schemas.microsoft.com/office/drawing/2014/main" xmlns="" id="{F1BB7E8A-669F-A247-FB50-4CF7AB872730}"/>
               </a:ext>
             </a:extLst>
           </p:cNvPr>
@@ -4910,7 +4910,7 @@
           <p:cNvPr id="2" name="Заголовок 1">
             <a:extLst>
               <a:ext uri="{FF2B5EF4-FFF2-40B4-BE49-F238E27FC236}">
-                <a16:creationId xmlns:a16="http://schemas.microsoft.com/office/drawing/2014/main" id="{803590CB-89B8-0CCF-AF82-433500DA3FCE}"/>
+                <a16:creationId xmlns:a16="http://schemas.microsoft.com/office/drawing/2014/main" xmlns="" id="{803590CB-89B8-0CCF-AF82-433500DA3FCE}"/>
               </a:ext>
             </a:extLst>
           </p:cNvPr>
@@ -4955,7 +4955,7 @@
           <p:cNvPr id="3" name="Объект 2">
             <a:extLst>
               <a:ext uri="{FF2B5EF4-FFF2-40B4-BE49-F238E27FC236}">
-                <a16:creationId xmlns:a16="http://schemas.microsoft.com/office/drawing/2014/main" id="{F9134BD0-99A4-B816-92B4-5CE1E228A364}"/>
+                <a16:creationId xmlns:a16="http://schemas.microsoft.com/office/drawing/2014/main" xmlns="" id="{F9134BD0-99A4-B816-92B4-5CE1E228A364}"/>
               </a:ext>
             </a:extLst>
           </p:cNvPr>
@@ -5056,7 +5056,7 @@
           <p:cNvPr id="4" name="Дата 3">
             <a:extLst>
               <a:ext uri="{FF2B5EF4-FFF2-40B4-BE49-F238E27FC236}">
-                <a16:creationId xmlns:a16="http://schemas.microsoft.com/office/drawing/2014/main" id="{A2A40B3E-79F7-8995-9A28-690544A358D9}"/>
+                <a16:creationId xmlns:a16="http://schemas.microsoft.com/office/drawing/2014/main" xmlns="" id="{A2A40B3E-79F7-8995-9A28-690544A358D9}"/>
               </a:ext>
             </a:extLst>
           </p:cNvPr>
@@ -5073,7 +5073,7 @@
           <a:lstStyle/>
           <a:p>
             <a:fld id="{43E6FAF5-1844-445E-BDDB-29D5EC5413AD}" type="datetime1">
-              <a:t>12/26/2025</a:t>
+              <a:t>12.02.2026</a:t>
             </a:fld>
             <a:endParaRPr lang="en-US" dirty="0"/>
           </a:p>
@@ -5084,7 +5084,7 @@
           <p:cNvPr id="5" name="Нижний колонтитул 4">
             <a:extLst>
               <a:ext uri="{FF2B5EF4-FFF2-40B4-BE49-F238E27FC236}">
-                <a16:creationId xmlns:a16="http://schemas.microsoft.com/office/drawing/2014/main" id="{6FD46D28-D0F7-5620-C0F8-4C6A2A26D960}"/>
+                <a16:creationId xmlns:a16="http://schemas.microsoft.com/office/drawing/2014/main" xmlns="" id="{6FD46D28-D0F7-5620-C0F8-4C6A2A26D960}"/>
               </a:ext>
             </a:extLst>
           </p:cNvPr>
@@ -5113,7 +5113,7 @@
           <p:cNvPr id="6" name="Номер слайда 5">
             <a:extLst>
               <a:ext uri="{FF2B5EF4-FFF2-40B4-BE49-F238E27FC236}">
-                <a16:creationId xmlns:a16="http://schemas.microsoft.com/office/drawing/2014/main" id="{18BC4A29-4694-78D3-8AF5-8E76FF2565D3}"/>
+                <a16:creationId xmlns:a16="http://schemas.microsoft.com/office/drawing/2014/main" xmlns="" id="{18BC4A29-4694-78D3-8AF5-8E76FF2565D3}"/>
               </a:ext>
             </a:extLst>
           </p:cNvPr>
@@ -5172,7 +5172,7 @@
           <p:cNvPr id="2" name="Заголовок 1">
             <a:extLst>
               <a:ext uri="{FF2B5EF4-FFF2-40B4-BE49-F238E27FC236}">
-                <a16:creationId xmlns:a16="http://schemas.microsoft.com/office/drawing/2014/main" id="{702C7B5B-E0A9-BCDA-40A9-5C7421F6BBB0}"/>
+                <a16:creationId xmlns:a16="http://schemas.microsoft.com/office/drawing/2014/main" xmlns="" id="{702C7B5B-E0A9-BCDA-40A9-5C7421F6BBB0}"/>
               </a:ext>
             </a:extLst>
           </p:cNvPr>
@@ -5205,7 +5205,7 @@
           <p:cNvPr id="3" name="Объект 2">
             <a:extLst>
               <a:ext uri="{FF2B5EF4-FFF2-40B4-BE49-F238E27FC236}">
-                <a16:creationId xmlns:a16="http://schemas.microsoft.com/office/drawing/2014/main" id="{14C66ECD-00FE-C2B1-DA87-3A226F43AB59}"/>
+                <a16:creationId xmlns:a16="http://schemas.microsoft.com/office/drawing/2014/main" xmlns="" id="{14C66ECD-00FE-C2B1-DA87-3A226F43AB59}"/>
               </a:ext>
             </a:extLst>
           </p:cNvPr>
@@ -5293,7 +5293,7 @@
           <p:cNvPr id="4" name="Дата 3">
             <a:extLst>
               <a:ext uri="{FF2B5EF4-FFF2-40B4-BE49-F238E27FC236}">
-                <a16:creationId xmlns:a16="http://schemas.microsoft.com/office/drawing/2014/main" id="{EF3565F4-4CE9-D5FD-611C-9FDAABF593B0}"/>
+                <a16:creationId xmlns:a16="http://schemas.microsoft.com/office/drawing/2014/main" xmlns="" id="{EF3565F4-4CE9-D5FD-611C-9FDAABF593B0}"/>
               </a:ext>
             </a:extLst>
           </p:cNvPr>
@@ -5310,7 +5310,7 @@
           <a:lstStyle/>
           <a:p>
             <a:fld id="{353EED45-B96C-4925-A5DE-7858F9B23E56}" type="datetime1">
-              <a:t>12/26/2025</a:t>
+              <a:t>12.02.2026</a:t>
             </a:fld>
             <a:endParaRPr lang="en-US" dirty="0"/>
           </a:p>
@@ -5321,7 +5321,7 @@
           <p:cNvPr id="5" name="Нижний колонтитул 4">
             <a:extLst>
               <a:ext uri="{FF2B5EF4-FFF2-40B4-BE49-F238E27FC236}">
-                <a16:creationId xmlns:a16="http://schemas.microsoft.com/office/drawing/2014/main" id="{5D97AF82-E0E8-7D32-E5C3-5E994A5EFF79}"/>
+                <a16:creationId xmlns:a16="http://schemas.microsoft.com/office/drawing/2014/main" xmlns="" id="{5D97AF82-E0E8-7D32-E5C3-5E994A5EFF79}"/>
               </a:ext>
             </a:extLst>
           </p:cNvPr>
@@ -5350,7 +5350,7 @@
           <p:cNvPr id="6" name="Номер слайда 5">
             <a:extLst>
               <a:ext uri="{FF2B5EF4-FFF2-40B4-BE49-F238E27FC236}">
-                <a16:creationId xmlns:a16="http://schemas.microsoft.com/office/drawing/2014/main" id="{21C0B150-F163-CD70-C2B0-AE8EF4FAC129}"/>
+                <a16:creationId xmlns:a16="http://schemas.microsoft.com/office/drawing/2014/main" xmlns="" id="{21C0B150-F163-CD70-C2B0-AE8EF4FAC129}"/>
               </a:ext>
             </a:extLst>
           </p:cNvPr>
@@ -5379,7 +5379,7 @@
           <p:cNvPr id="7" name="Рисунок 6" descr="Изображение выглядит как игрушка, мультфильм, черно-белый&#10;&#10;Содержимое, созданное искусственным интеллектом, может быть неверным.">
             <a:extLst>
               <a:ext uri="{FF2B5EF4-FFF2-40B4-BE49-F238E27FC236}">
-                <a16:creationId xmlns:a16="http://schemas.microsoft.com/office/drawing/2014/main" id="{411C94E0-1819-1625-74AE-04507EE5081A}"/>
+                <a16:creationId xmlns:a16="http://schemas.microsoft.com/office/drawing/2014/main" xmlns="" id="{411C94E0-1819-1625-74AE-04507EE5081A}"/>
               </a:ext>
             </a:extLst>
           </p:cNvPr>
@@ -5439,7 +5439,7 @@
           <p:cNvPr id="2" name="Заголовок 1">
             <a:extLst>
               <a:ext uri="{FF2B5EF4-FFF2-40B4-BE49-F238E27FC236}">
-                <a16:creationId xmlns:a16="http://schemas.microsoft.com/office/drawing/2014/main" id="{1EC0BF6C-B437-9ECB-6065-81CFFCBED5CA}"/>
+                <a16:creationId xmlns:a16="http://schemas.microsoft.com/office/drawing/2014/main" xmlns="" id="{1EC0BF6C-B437-9ECB-6065-81CFFCBED5CA}"/>
               </a:ext>
             </a:extLst>
           </p:cNvPr>
@@ -5472,7 +5472,7 @@
           <p:cNvPr id="3" name="Объект 2">
             <a:extLst>
               <a:ext uri="{FF2B5EF4-FFF2-40B4-BE49-F238E27FC236}">
-                <a16:creationId xmlns:a16="http://schemas.microsoft.com/office/drawing/2014/main" id="{A886A3B6-5588-CED7-9079-A0F48EFB30B8}"/>
+                <a16:creationId xmlns:a16="http://schemas.microsoft.com/office/drawing/2014/main" xmlns="" id="{A886A3B6-5588-CED7-9079-A0F48EFB30B8}"/>
               </a:ext>
             </a:extLst>
           </p:cNvPr>
@@ -5559,7 +5559,7 @@
           <p:cNvPr id="4" name="Дата 3">
             <a:extLst>
               <a:ext uri="{FF2B5EF4-FFF2-40B4-BE49-F238E27FC236}">
-                <a16:creationId xmlns:a16="http://schemas.microsoft.com/office/drawing/2014/main" id="{6EAFED1E-F15B-6780-10B2-D5CCC4391DFB}"/>
+                <a16:creationId xmlns:a16="http://schemas.microsoft.com/office/drawing/2014/main" xmlns="" id="{6EAFED1E-F15B-6780-10B2-D5CCC4391DFB}"/>
               </a:ext>
             </a:extLst>
           </p:cNvPr>
@@ -5576,7 +5576,7 @@
           <a:lstStyle/>
           <a:p>
             <a:fld id="{6A01E654-6D55-4AC6-8FCC-74DE08E3905F}" type="datetime1">
-              <a:t>12/26/2025</a:t>
+              <a:t>12.02.2026</a:t>
             </a:fld>
             <a:endParaRPr lang="en-US" dirty="0"/>
           </a:p>
@@ -5587,7 +5587,7 @@
           <p:cNvPr id="5" name="Нижний колонтитул 4">
             <a:extLst>
               <a:ext uri="{FF2B5EF4-FFF2-40B4-BE49-F238E27FC236}">
-                <a16:creationId xmlns:a16="http://schemas.microsoft.com/office/drawing/2014/main" id="{75C2E33E-2A44-9B75-74B7-3707E3F0C97A}"/>
+                <a16:creationId xmlns:a16="http://schemas.microsoft.com/office/drawing/2014/main" xmlns="" id="{75C2E33E-2A44-9B75-74B7-3707E3F0C97A}"/>
               </a:ext>
             </a:extLst>
           </p:cNvPr>
@@ -5616,7 +5616,7 @@
           <p:cNvPr id="6" name="Номер слайда 5">
             <a:extLst>
               <a:ext uri="{FF2B5EF4-FFF2-40B4-BE49-F238E27FC236}">
-                <a16:creationId xmlns:a16="http://schemas.microsoft.com/office/drawing/2014/main" id="{EC357120-80B2-FADB-E1AE-74580C0B25A1}"/>
+                <a16:creationId xmlns:a16="http://schemas.microsoft.com/office/drawing/2014/main" xmlns="" id="{EC357120-80B2-FADB-E1AE-74580C0B25A1}"/>
               </a:ext>
             </a:extLst>
           </p:cNvPr>
@@ -5675,7 +5675,7 @@
           <p:cNvPr id="2" name="Заголовок 1">
             <a:extLst>
               <a:ext uri="{FF2B5EF4-FFF2-40B4-BE49-F238E27FC236}">
-                <a16:creationId xmlns:a16="http://schemas.microsoft.com/office/drawing/2014/main" id="{A86E125C-C944-0C6F-6B2A-497365B6A4D1}"/>
+                <a16:creationId xmlns:a16="http://schemas.microsoft.com/office/drawing/2014/main" xmlns="" id="{A86E125C-C944-0C6F-6B2A-497365B6A4D1}"/>
               </a:ext>
             </a:extLst>
           </p:cNvPr>
@@ -5708,7 +5708,7 @@
           <p:cNvPr id="3" name="Объект 2">
             <a:extLst>
               <a:ext uri="{FF2B5EF4-FFF2-40B4-BE49-F238E27FC236}">
-                <a16:creationId xmlns:a16="http://schemas.microsoft.com/office/drawing/2014/main" id="{79B67FB7-B076-2315-C8DE-86AFC1AF5CCC}"/>
+                <a16:creationId xmlns:a16="http://schemas.microsoft.com/office/drawing/2014/main" xmlns="" id="{79B67FB7-B076-2315-C8DE-86AFC1AF5CCC}"/>
               </a:ext>
             </a:extLst>
           </p:cNvPr>
@@ -5840,7 +5840,7 @@
           <p:cNvPr id="4" name="Дата 3">
             <a:extLst>
               <a:ext uri="{FF2B5EF4-FFF2-40B4-BE49-F238E27FC236}">
-                <a16:creationId xmlns:a16="http://schemas.microsoft.com/office/drawing/2014/main" id="{73FC55FC-5A3B-A1A7-12E9-B2BDEF2CF374}"/>
+                <a16:creationId xmlns:a16="http://schemas.microsoft.com/office/drawing/2014/main" xmlns="" id="{73FC55FC-5A3B-A1A7-12E9-B2BDEF2CF374}"/>
               </a:ext>
             </a:extLst>
           </p:cNvPr>
@@ -5857,7 +5857,7 @@
           <a:lstStyle/>
           <a:p>
             <a:fld id="{3E288D26-67B1-47EE-8B0A-58AE383B0832}" type="datetime1">
-              <a:t>12/26/2025</a:t>
+              <a:t>12.02.2026</a:t>
             </a:fld>
             <a:endParaRPr lang="en-US" dirty="0"/>
           </a:p>
@@ -5868,7 +5868,7 @@
           <p:cNvPr id="5" name="Нижний колонтитул 4">
             <a:extLst>
               <a:ext uri="{FF2B5EF4-FFF2-40B4-BE49-F238E27FC236}">
-                <a16:creationId xmlns:a16="http://schemas.microsoft.com/office/drawing/2014/main" id="{3B82B7A4-A6B2-F5CD-5959-C81B6349601F}"/>
+                <a16:creationId xmlns:a16="http://schemas.microsoft.com/office/drawing/2014/main" xmlns="" id="{3B82B7A4-A6B2-F5CD-5959-C81B6349601F}"/>
               </a:ext>
             </a:extLst>
           </p:cNvPr>
@@ -5897,7 +5897,7 @@
           <p:cNvPr id="6" name="Номер слайда 5">
             <a:extLst>
               <a:ext uri="{FF2B5EF4-FFF2-40B4-BE49-F238E27FC236}">
-                <a16:creationId xmlns:a16="http://schemas.microsoft.com/office/drawing/2014/main" id="{FFA3E41A-59ED-D315-F8CB-3883A269074B}"/>
+                <a16:creationId xmlns:a16="http://schemas.microsoft.com/office/drawing/2014/main" xmlns="" id="{FFA3E41A-59ED-D315-F8CB-3883A269074B}"/>
               </a:ext>
             </a:extLst>
           </p:cNvPr>
@@ -5926,7 +5926,7 @@
           <p:cNvPr id="8" name="Рисунок 7" descr="Изображение выглядит как мультфильм, игрушка, черно-белый&#10;&#10;Содержимое, созданное искусственным интеллектом, может быть неверным.">
             <a:extLst>
               <a:ext uri="{FF2B5EF4-FFF2-40B4-BE49-F238E27FC236}">
-                <a16:creationId xmlns:a16="http://schemas.microsoft.com/office/drawing/2014/main" id="{702A5340-E80B-B712-F4B5-DEF64CB70ECF}"/>
+                <a16:creationId xmlns:a16="http://schemas.microsoft.com/office/drawing/2014/main" xmlns="" id="{702A5340-E80B-B712-F4B5-DEF64CB70ECF}"/>
               </a:ext>
             </a:extLst>
           </p:cNvPr>
@@ -5986,7 +5986,7 @@
           <p:cNvPr id="2" name="Заголовок 1">
             <a:extLst>
               <a:ext uri="{FF2B5EF4-FFF2-40B4-BE49-F238E27FC236}">
-                <a16:creationId xmlns:a16="http://schemas.microsoft.com/office/drawing/2014/main" id="{43B00884-7220-F91A-DE88-ECC85C8059A6}"/>
+                <a16:creationId xmlns:a16="http://schemas.microsoft.com/office/drawing/2014/main" xmlns="" id="{43B00884-7220-F91A-DE88-ECC85C8059A6}"/>
               </a:ext>
             </a:extLst>
           </p:cNvPr>
@@ -6019,7 +6019,7 @@
           <p:cNvPr id="3" name="Объект 2">
             <a:extLst>
               <a:ext uri="{FF2B5EF4-FFF2-40B4-BE49-F238E27FC236}">
-                <a16:creationId xmlns:a16="http://schemas.microsoft.com/office/drawing/2014/main" id="{45BFF78D-A482-319A-A157-D883A82EF604}"/>
+                <a16:creationId xmlns:a16="http://schemas.microsoft.com/office/drawing/2014/main" xmlns="" id="{45BFF78D-A482-319A-A157-D883A82EF604}"/>
               </a:ext>
             </a:extLst>
           </p:cNvPr>
@@ -6085,7 +6085,7 @@
           <p:cNvPr id="4" name="Дата 3">
             <a:extLst>
               <a:ext uri="{FF2B5EF4-FFF2-40B4-BE49-F238E27FC236}">
-                <a16:creationId xmlns:a16="http://schemas.microsoft.com/office/drawing/2014/main" id="{7A2476F2-A80D-2BE7-425F-A72C21F03BE5}"/>
+                <a16:creationId xmlns:a16="http://schemas.microsoft.com/office/drawing/2014/main" xmlns="" id="{7A2476F2-A80D-2BE7-425F-A72C21F03BE5}"/>
               </a:ext>
             </a:extLst>
           </p:cNvPr>
@@ -6102,7 +6102,7 @@
           <a:lstStyle/>
           <a:p>
             <a:fld id="{E7D3664E-F13D-48D4-AE24-0C47AC6E8252}" type="datetime1">
-              <a:t>12/26/2025</a:t>
+              <a:t>12.02.2026</a:t>
             </a:fld>
             <a:endParaRPr lang="en-US" dirty="0"/>
           </a:p>
@@ -6113,7 +6113,7 @@
           <p:cNvPr id="5" name="Нижний колонтитул 4">
             <a:extLst>
               <a:ext uri="{FF2B5EF4-FFF2-40B4-BE49-F238E27FC236}">
-                <a16:creationId xmlns:a16="http://schemas.microsoft.com/office/drawing/2014/main" id="{DDA564EF-F102-021D-CA0E-25A70083B490}"/>
+                <a16:creationId xmlns:a16="http://schemas.microsoft.com/office/drawing/2014/main" xmlns="" id="{DDA564EF-F102-021D-CA0E-25A70083B490}"/>
               </a:ext>
             </a:extLst>
           </p:cNvPr>
@@ -6142,7 +6142,7 @@
           <p:cNvPr id="6" name="Номер слайда 5">
             <a:extLst>
               <a:ext uri="{FF2B5EF4-FFF2-40B4-BE49-F238E27FC236}">
-                <a16:creationId xmlns:a16="http://schemas.microsoft.com/office/drawing/2014/main" id="{96ADA42B-9AD4-F6A2-3098-E4C8F5C59174}"/>
+                <a16:creationId xmlns:a16="http://schemas.microsoft.com/office/drawing/2014/main" xmlns="" id="{96ADA42B-9AD4-F6A2-3098-E4C8F5C59174}"/>
               </a:ext>
             </a:extLst>
           </p:cNvPr>
@@ -6171,7 +6171,7 @@
           <p:cNvPr id="8" name="Рисунок 7" descr="Изображение выглядит как игрушка, мультфильм&#10;&#10;Содержимое, созданное искусственным интеллектом, может быть неверным.">
             <a:extLst>
               <a:ext uri="{FF2B5EF4-FFF2-40B4-BE49-F238E27FC236}">
-                <a16:creationId xmlns:a16="http://schemas.microsoft.com/office/drawing/2014/main" id="{B5402082-9009-AC84-4132-0B882ECB93A8}"/>
+                <a16:creationId xmlns:a16="http://schemas.microsoft.com/office/drawing/2014/main" xmlns="" id="{B5402082-9009-AC84-4132-0B882ECB93A8}"/>
               </a:ext>
             </a:extLst>
           </p:cNvPr>
@@ -6231,7 +6231,7 @@
           <p:cNvPr id="2" name="Заголовок 1">
             <a:extLst>
               <a:ext uri="{FF2B5EF4-FFF2-40B4-BE49-F238E27FC236}">
-                <a16:creationId xmlns:a16="http://schemas.microsoft.com/office/drawing/2014/main" id="{138951D4-D1DF-E95B-1297-817FFCBD0C38}"/>
+                <a16:creationId xmlns:a16="http://schemas.microsoft.com/office/drawing/2014/main" xmlns="" id="{138951D4-D1DF-E95B-1297-817FFCBD0C38}"/>
               </a:ext>
             </a:extLst>
           </p:cNvPr>
@@ -6264,7 +6264,7 @@
           <p:cNvPr id="3" name="Объект 2">
             <a:extLst>
               <a:ext uri="{FF2B5EF4-FFF2-40B4-BE49-F238E27FC236}">
-                <a16:creationId xmlns:a16="http://schemas.microsoft.com/office/drawing/2014/main" id="{72468344-A70E-C35E-CD19-04C69E57528F}"/>
+                <a16:creationId xmlns:a16="http://schemas.microsoft.com/office/drawing/2014/main" xmlns="" id="{72468344-A70E-C35E-CD19-04C69E57528F}"/>
               </a:ext>
             </a:extLst>
           </p:cNvPr>
@@ -6350,7 +6350,7 @@
           <p:cNvPr id="4" name="Дата 3">
             <a:extLst>
               <a:ext uri="{FF2B5EF4-FFF2-40B4-BE49-F238E27FC236}">
-                <a16:creationId xmlns:a16="http://schemas.microsoft.com/office/drawing/2014/main" id="{644AF79E-880C-0EFD-6D23-FF25D3B7D183}"/>
+                <a16:creationId xmlns:a16="http://schemas.microsoft.com/office/drawing/2014/main" xmlns="" id="{644AF79E-880C-0EFD-6D23-FF25D3B7D183}"/>
               </a:ext>
             </a:extLst>
           </p:cNvPr>
@@ -6367,7 +6367,7 @@
           <a:lstStyle/>
           <a:p>
             <a:fld id="{D5628B58-E4B3-4E76-B36B-271BBC77A8A9}" type="datetime1">
-              <a:t>12/26/2025</a:t>
+              <a:t>12.02.2026</a:t>
             </a:fld>
             <a:endParaRPr lang="en-US" dirty="0"/>
           </a:p>
@@ -6378,7 +6378,7 @@
           <p:cNvPr id="5" name="Нижний колонтитул 4">
             <a:extLst>
               <a:ext uri="{FF2B5EF4-FFF2-40B4-BE49-F238E27FC236}">
-                <a16:creationId xmlns:a16="http://schemas.microsoft.com/office/drawing/2014/main" id="{BB6B83EA-F937-9BEE-15E8-F8282585430D}"/>
+                <a16:creationId xmlns:a16="http://schemas.microsoft.com/office/drawing/2014/main" xmlns="" id="{BB6B83EA-F937-9BEE-15E8-F8282585430D}"/>
               </a:ext>
             </a:extLst>
           </p:cNvPr>
@@ -6407,7 +6407,7 @@
           <p:cNvPr id="6" name="Номер слайда 5">
             <a:extLst>
               <a:ext uri="{FF2B5EF4-FFF2-40B4-BE49-F238E27FC236}">
-                <a16:creationId xmlns:a16="http://schemas.microsoft.com/office/drawing/2014/main" id="{A9CF07D3-241E-7996-F014-A0B008D2E164}"/>
+                <a16:creationId xmlns:a16="http://schemas.microsoft.com/office/drawing/2014/main" xmlns="" id="{A9CF07D3-241E-7996-F014-A0B008D2E164}"/>
               </a:ext>
             </a:extLst>
           </p:cNvPr>
@@ -6436,7 +6436,7 @@
           <p:cNvPr id="7" name="Рисунок 6" descr="Изображение выглядит как мультфильм, мяч, игрушка&#10;&#10;Содержимое, созданное искусственным интеллектом, может быть неверным.">
             <a:extLst>
               <a:ext uri="{FF2B5EF4-FFF2-40B4-BE49-F238E27FC236}">
-                <a16:creationId xmlns:a16="http://schemas.microsoft.com/office/drawing/2014/main" id="{815FF6AD-70C4-EBB7-555D-9A4977F9D2C6}"/>
+                <a16:creationId xmlns:a16="http://schemas.microsoft.com/office/drawing/2014/main" xmlns="" id="{815FF6AD-70C4-EBB7-555D-9A4977F9D2C6}"/>
               </a:ext>
             </a:extLst>
           </p:cNvPr>
@@ -6689,7 +6689,7 @@
   <a:extraClrSchemeLst/>
   <a:extLst>
     <a:ext uri="{05A4C25C-085E-4340-85A3-A5531E510DB2}">
-      <thm15:themeFamily xmlns:thm15="http://schemas.microsoft.com/office/thememl/2012/main" name="BohoVogueVTI" id="{587E0025-A466-4551-A341-1A9F570FDF06}" vid="{F615CBBD-D1BB-4663-887F-92A47C7C6ABA}"/>
+      <thm15:themeFamily xmlns:thm15="http://schemas.microsoft.com/office/thememl/2012/main" xmlns="" name="BohoVogueVTI" id="{587E0025-A466-4551-A341-1A9F570FDF06}" vid="{F615CBBD-D1BB-4663-887F-92A47C7C6ABA}"/>
     </a:ext>
   </a:extLst>
 </a:theme>
